--- a/docs/presentaciones/classes/clase-205-interpretabilidad-shap-lime-pdp-ice-presentacion.pptx
+++ b/docs/presentaciones/classes/clase-205-interpretabilidad-shap-lime-pdp-ice-presentacion.pptx
@@ -3272,7 +3272,7 @@
                 </a:solidFill>
                 <a:latin typeface="Segoe UI"/>
               </a:rPr>
-              <a:t>Parte: 4 — MLOps · Fuente: Molnar, Interpretable ML (2ª ed.) + Lundberg &amp; Lee (2017, NIPS, SHAP paper) + Ribeiro et al. (2016, KDD, LIME paper).  Duración estimada: 80 min. · Esta clase es complementaria a la Clase 079 (SHAP profundo, Parte 1). Acá el foco es producción: cómo integrar interpretabilidad al servicio (/explain endpoint), cómo escalar SHAP a grandes datasets, y cómo presentar explicaciones a stakeholders no técnicos.</a:t>
+              <a:t>Parte: 4 — MLOps · Fuente: Molnar, Interpretable ML (2ª ed.) + Lundberg &amp; Lee (2017, NIPS, SHAP paper) + Ribeiro et al. (2016, KDD, LIME paper).  Duración estimada: 80 min. · Nivel: Avanzado · Esta clase es complementaria a la Clase 079 (SHAP profundo, Parte 1). Acá el foco es producción: cómo integrar interpretabilidad al servicio (/explain endpoint), cómo escalar SHAP a grandes datasets, y cómo presentar explicaciones a stakeholders no técnicos.</a:t>
             </a:r>
           </a:p>
         </p:txBody>
@@ -3581,7 +3581,7 @@
                 </a:solidFill>
                 <a:latin typeface="Segoe UI"/>
               </a:rPr>
-              <a:t>Parte: 4 — MLOps · Fuente: Molnar, Interpretable ML (2ª ed.) + Lundberg &amp; Lee (2017, NIPS, SHAP paper) + Ribeiro et al. (2016, KDD, LIME paper).  Duración estimada: 80 min. · Esta clase es complementaria a la Clase 079 (SHAP profundo, Parte 1). Acá el foco es producción: cómo integrar interpretabilidad al servicio (/explain endpoint), cómo escalar SHAP a grandes datasets, y cómo presentar explicaciones a stakeholders no técnicos.</a:t>
+              <a:t>Parte: 4 — MLOps · Fuente: Molnar, Interpretable ML (2ª ed.) + Lundberg &amp; Lee (2017, NIPS, SHAP paper) + Ribeiro et al. (2016, KDD, LIME paper).  Duración estimada: 80 min. · Nivel: Avanzado · Esta clase es complementaria a la Clase 079 (SHAP profundo, Parte 1). Acá el foco es producción: cómo integrar interpretabilidad al servicio (/explain endpoint), cómo escalar SHAP a grandes datasets, y cómo presentar explicaciones a stakeholders no técnicos.</a:t>
             </a:r>
           </a:p>
         </p:txBody>
